--- a/ppt/2.Kafka 기본 개념.pptx
+++ b/ppt/2.Kafka 기본 개념.pptx
@@ -435,7 +435,7 @@
           <a:p>
             <a:fld id="{EA119510-20E8-4CAB-9777-7EBBF5E17EEB}" type="datetimeFigureOut">
               <a:rPr lang="ko-KR" altLang="en-US" smtClean="0"/>
-              <a:t>2026-08-11</a:t>
+              <a:t>2026-09-23</a:t>
             </a:fld>
             <a:endParaRPr lang="ko-KR" altLang="en-US"/>
           </a:p>
@@ -643,7 +643,7 @@
           <a:p>
             <a:fld id="{EA119510-20E8-4CAB-9777-7EBBF5E17EEB}" type="datetimeFigureOut">
               <a:rPr lang="ko-KR" altLang="en-US" smtClean="0"/>
-              <a:t>2026-08-11</a:t>
+              <a:t>2026-09-23</a:t>
             </a:fld>
             <a:endParaRPr lang="ko-KR" altLang="en-US"/>
           </a:p>
@@ -899,7 +899,7 @@
           <a:p>
             <a:fld id="{EA119510-20E8-4CAB-9777-7EBBF5E17EEB}" type="datetimeFigureOut">
               <a:rPr lang="ko-KR" altLang="en-US" smtClean="0"/>
-              <a:t>2026-08-11</a:t>
+              <a:t>2026-09-23</a:t>
             </a:fld>
             <a:endParaRPr lang="ko-KR" altLang="en-US"/>
           </a:p>
@@ -1073,7 +1073,7 @@
           <a:p>
             <a:fld id="{EA119510-20E8-4CAB-9777-7EBBF5E17EEB}" type="datetimeFigureOut">
               <a:rPr lang="ko-KR" altLang="en-US" smtClean="0"/>
-              <a:t>2026-08-11</a:t>
+              <a:t>2026-09-23</a:t>
             </a:fld>
             <a:endParaRPr lang="ko-KR" altLang="en-US"/>
           </a:p>
@@ -1416,7 +1416,7 @@
           <a:p>
             <a:fld id="{EA119510-20E8-4CAB-9777-7EBBF5E17EEB}" type="datetimeFigureOut">
               <a:rPr lang="ko-KR" altLang="en-US" smtClean="0"/>
-              <a:t>2026-08-11</a:t>
+              <a:t>2026-09-23</a:t>
             </a:fld>
             <a:endParaRPr lang="ko-KR" altLang="en-US"/>
           </a:p>
@@ -1691,7 +1691,7 @@
           <a:p>
             <a:fld id="{EA119510-20E8-4CAB-9777-7EBBF5E17EEB}" type="datetimeFigureOut">
               <a:rPr lang="ko-KR" altLang="en-US" smtClean="0"/>
-              <a:t>2026-08-11</a:t>
+              <a:t>2026-09-23</a:t>
             </a:fld>
             <a:endParaRPr lang="ko-KR" altLang="en-US"/>
           </a:p>
@@ -2070,7 +2070,7 @@
           <a:p>
             <a:fld id="{EA119510-20E8-4CAB-9777-7EBBF5E17EEB}" type="datetimeFigureOut">
               <a:rPr lang="ko-KR" altLang="en-US" smtClean="0"/>
-              <a:t>2026-08-11</a:t>
+              <a:t>2026-09-23</a:t>
             </a:fld>
             <a:endParaRPr lang="ko-KR" altLang="en-US"/>
           </a:p>
@@ -2188,7 +2188,7 @@
           <a:p>
             <a:fld id="{EA119510-20E8-4CAB-9777-7EBBF5E17EEB}" type="datetimeFigureOut">
               <a:rPr lang="ko-KR" altLang="en-US" smtClean="0"/>
-              <a:t>2026-08-11</a:t>
+              <a:t>2026-09-23</a:t>
             </a:fld>
             <a:endParaRPr lang="ko-KR" altLang="en-US"/>
           </a:p>
@@ -2359,7 +2359,7 @@
           <a:p>
             <a:fld id="{EA119510-20E8-4CAB-9777-7EBBF5E17EEB}" type="datetimeFigureOut">
               <a:rPr lang="ko-KR" altLang="en-US" smtClean="0"/>
-              <a:t>2026-08-11</a:t>
+              <a:t>2026-09-23</a:t>
             </a:fld>
             <a:endParaRPr lang="ko-KR" altLang="en-US"/>
           </a:p>
@@ -2713,7 +2713,7 @@
           <a:p>
             <a:fld id="{EA119510-20E8-4CAB-9777-7EBBF5E17EEB}" type="datetimeFigureOut">
               <a:rPr lang="ko-KR" altLang="en-US" smtClean="0"/>
-              <a:t>2026-08-11</a:t>
+              <a:t>2026-09-23</a:t>
             </a:fld>
             <a:endParaRPr lang="ko-KR" altLang="en-US"/>
           </a:p>
@@ -3095,7 +3095,7 @@
           <a:p>
             <a:fld id="{EA119510-20E8-4CAB-9777-7EBBF5E17EEB}" type="datetimeFigureOut">
               <a:rPr lang="ko-KR" altLang="en-US" smtClean="0"/>
-              <a:t>2026-08-11</a:t>
+              <a:t>2026-09-23</a:t>
             </a:fld>
             <a:endParaRPr lang="ko-KR" altLang="en-US"/>
           </a:p>
@@ -3382,7 +3382,7 @@
           <a:p>
             <a:fld id="{EA119510-20E8-4CAB-9777-7EBBF5E17EEB}" type="datetimeFigureOut">
               <a:rPr lang="ko-KR" altLang="en-US" smtClean="0"/>
-              <a:t>2026-08-11</a:t>
+              <a:t>2026-09-23</a:t>
             </a:fld>
             <a:endParaRPr lang="ko-KR" altLang="en-US"/>
           </a:p>
@@ -12156,7 +12156,7 @@
         <p:spPr>
           <a:xfrm>
             <a:off x="5413248" y="1865376"/>
-            <a:ext cx="6044184" cy="1815882"/>
+            <a:ext cx="6044184" cy="2246769"/>
           </a:xfrm>
           <a:prstGeom prst="rect">
             <a:avLst/>
@@ -12305,6 +12305,40 @@
                 <a:sym typeface="Wingdings" panose="05000000000000000000" pitchFamily="2" charset="2"/>
               </a:rPr>
               <a:t>메세지에 대한 종류를 구분하는 개념</a:t>
+            </a:r>
+            <a:endParaRPr lang="en-US" altLang="ko-KR" sz="1400">
+              <a:sym typeface="Wingdings" panose="05000000000000000000" pitchFamily="2" charset="2"/>
+            </a:endParaRPr>
+          </a:p>
+          <a:p>
+            <a:endParaRPr lang="en-US" altLang="ko-KR" sz="1400">
+              <a:sym typeface="Wingdings" panose="05000000000000000000" pitchFamily="2" charset="2"/>
+            </a:endParaRPr>
+          </a:p>
+          <a:p>
+            <a:r>
+              <a:rPr lang="en-US" altLang="ko-KR" sz="1400">
+                <a:sym typeface="Wingdings" panose="05000000000000000000" pitchFamily="2" charset="2"/>
+              </a:rPr>
+              <a:t>(K-training) </a:t>
+            </a:r>
+            <a:r>
+              <a:rPr lang="ko-KR" altLang="en-US" sz="1400">
+                <a:sym typeface="Wingdings" panose="05000000000000000000" pitchFamily="2" charset="2"/>
+              </a:rPr>
+              <a:t>레코드 </a:t>
+            </a:r>
+            <a:r>
+              <a:rPr lang="en-US" altLang="ko-KR" sz="1400">
+                <a:sym typeface="Wingdings" panose="05000000000000000000" pitchFamily="2" charset="2"/>
+              </a:rPr>
+              <a:t>= </a:t>
+            </a:r>
+            <a:r>
+              <a:rPr lang="ko-KR" altLang="en-US" sz="1400">
+                <a:sym typeface="Wingdings" panose="05000000000000000000" pitchFamily="2" charset="2"/>
+              </a:rPr>
+              <a:t>메세지</a:t>
             </a:r>
             <a:endParaRPr lang="en-US" altLang="ko-KR" sz="1400">
               <a:sym typeface="Wingdings" panose="05000000000000000000" pitchFamily="2" charset="2"/>
